--- a/tests/benchmark/architectural_slides/case_009_patient_journey/output.pptx
+++ b/tests/benchmark/architectural_slides/case_009_patient_journey/output.pptx
@@ -910,7 +910,7 @@
         <p:spPr>
           <a:xfrm>
             <a:off x="640080" y="411480"/>
-            <a:ext cx="7863840" cy="411480"/>
+            <a:ext cx="7863840" cy="601218"/>
           </a:xfrm>
           <a:prstGeom prst="rect">
             <a:avLst/>
@@ -948,8 +948,8 @@
         </p:nvSpPr>
         <p:spPr>
           <a:xfrm>
-            <a:off x="640080" y="861060"/>
-            <a:ext cx="7863840" cy="292608"/>
+            <a:off x="640080" y="1050798"/>
+            <a:ext cx="7863840" cy="326898"/>
           </a:xfrm>
           <a:prstGeom prst="rect">
             <a:avLst/>
@@ -987,8 +987,8 @@
         </p:nvSpPr>
         <p:spPr>
           <a:xfrm>
-            <a:off x="640080" y="1229868"/>
-            <a:ext cx="1481328" cy="2558796"/>
+            <a:off x="640080" y="1453896"/>
+            <a:ext cx="1481328" cy="2334768"/>
           </a:xfrm>
           <a:prstGeom prst="rect">
             <a:avLst/>
@@ -1026,7 +1026,7 @@
         </p:nvSpPr>
         <p:spPr>
           <a:xfrm>
-            <a:off x="2121408" y="2125447"/>
+            <a:off x="2121408" y="2271065"/>
             <a:ext cx="114300" cy="256032"/>
           </a:xfrm>
           <a:prstGeom prst="rect">
@@ -1051,8 +1051,8 @@
         </p:nvSpPr>
         <p:spPr>
           <a:xfrm>
-            <a:off x="2235708" y="1229868"/>
-            <a:ext cx="1481328" cy="2558796"/>
+            <a:off x="2235708" y="1453896"/>
+            <a:ext cx="1481328" cy="2334768"/>
           </a:xfrm>
           <a:prstGeom prst="rect">
             <a:avLst/>
@@ -1090,7 +1090,7 @@
         </p:nvSpPr>
         <p:spPr>
           <a:xfrm>
-            <a:off x="3717036" y="2125447"/>
+            <a:off x="3717036" y="2271065"/>
             <a:ext cx="114300" cy="256032"/>
           </a:xfrm>
           <a:prstGeom prst="rect">
@@ -1115,8 +1115,8 @@
         </p:nvSpPr>
         <p:spPr>
           <a:xfrm>
-            <a:off x="3831336" y="1229868"/>
-            <a:ext cx="1481328" cy="2558796"/>
+            <a:off x="3831336" y="1453896"/>
+            <a:ext cx="1481328" cy="2334768"/>
           </a:xfrm>
           <a:prstGeom prst="rect">
             <a:avLst/>
@@ -1154,7 +1154,7 @@
         </p:nvSpPr>
         <p:spPr>
           <a:xfrm>
-            <a:off x="5312664" y="2125447"/>
+            <a:off x="5312664" y="2271065"/>
             <a:ext cx="114300" cy="256032"/>
           </a:xfrm>
           <a:prstGeom prst="rect">
@@ -1179,8 +1179,8 @@
         </p:nvSpPr>
         <p:spPr>
           <a:xfrm>
-            <a:off x="5426964" y="1229868"/>
-            <a:ext cx="1481328" cy="2558796"/>
+            <a:off x="5426964" y="1453896"/>
+            <a:ext cx="1481328" cy="2334768"/>
           </a:xfrm>
           <a:prstGeom prst="rect">
             <a:avLst/>
@@ -1218,7 +1218,7 @@
         </p:nvSpPr>
         <p:spPr>
           <a:xfrm>
-            <a:off x="6908292" y="2125447"/>
+            <a:off x="6908292" y="2271065"/>
             <a:ext cx="114300" cy="256032"/>
           </a:xfrm>
           <a:prstGeom prst="rect">
@@ -1243,8 +1243,8 @@
         </p:nvSpPr>
         <p:spPr>
           <a:xfrm>
-            <a:off x="7022592" y="1229868"/>
-            <a:ext cx="1481328" cy="2558796"/>
+            <a:off x="7022592" y="1453896"/>
+            <a:ext cx="1481328" cy="2334768"/>
           </a:xfrm>
           <a:prstGeom prst="rect">
             <a:avLst/>

--- a/tests/benchmark/architectural_slides/case_009_patient_journey/output.pptx
+++ b/tests/benchmark/architectural_slides/case_009_patient_journey/output.pptx
@@ -1037,7 +1037,7 @@
           </a:solidFill>
           <a:ln w="12700">
             <a:solidFill>
-              <a:srgbClr val="333333"/>
+              <a:srgbClr val="D9D5CF"/>
             </a:solidFill>
             <a:prstDash val="solid"/>
           </a:ln>
@@ -1101,7 +1101,7 @@
           </a:solidFill>
           <a:ln w="12700">
             <a:solidFill>
-              <a:srgbClr val="333333"/>
+              <a:srgbClr val="D9D5CF"/>
             </a:solidFill>
             <a:prstDash val="solid"/>
           </a:ln>
@@ -1165,7 +1165,7 @@
           </a:solidFill>
           <a:ln w="12700">
             <a:solidFill>
-              <a:srgbClr val="333333"/>
+              <a:srgbClr val="D9D5CF"/>
             </a:solidFill>
             <a:prstDash val="solid"/>
           </a:ln>
@@ -1229,7 +1229,7 @@
           </a:solidFill>
           <a:ln w="12700">
             <a:solidFill>
-              <a:srgbClr val="333333"/>
+              <a:srgbClr val="D9D5CF"/>
             </a:solidFill>
             <a:prstDash val="solid"/>
           </a:ln>

--- a/tests/benchmark/architectural_slides/case_009_patient_journey/output.pptx
+++ b/tests/benchmark/architectural_slides/case_009_patient_journey/output.pptx
@@ -910,7 +910,7 @@
         <p:spPr>
           <a:xfrm>
             <a:off x="640080" y="411480"/>
-            <a:ext cx="7863840" cy="601218"/>
+            <a:ext cx="7863840" cy="621792"/>
           </a:xfrm>
           <a:prstGeom prst="rect">
             <a:avLst/>
@@ -948,7 +948,7 @@
         </p:nvSpPr>
         <p:spPr>
           <a:xfrm>
-            <a:off x="640080" y="1050798"/>
+            <a:off x="640080" y="1071372"/>
             <a:ext cx="7863840" cy="326898"/>
           </a:xfrm>
           <a:prstGeom prst="rect">
@@ -981,14 +981,467 @@
       </p:sp>
       <p:sp>
         <p:nvSpPr>
-          <p:cNvPr id="4" name="Text 2"/>
-          <p:cNvSpPr/>
-          <p:nvPr/>
-        </p:nvSpPr>
-        <p:spPr>
-          <a:xfrm>
-            <a:off x="640080" y="1453896"/>
-            <a:ext cx="1481328" cy="2334768"/>
+          <p:cNvPr id="4" name="Shape 2"/>
+          <p:cNvSpPr/>
+          <p:nvPr/>
+        </p:nvSpPr>
+        <p:spPr>
+          <a:xfrm>
+            <a:off x="1380744" y="1752173"/>
+            <a:ext cx="6382512" cy="32004"/>
+          </a:xfrm>
+          <a:prstGeom prst="rect">
+            <a:avLst/>
+          </a:prstGeom>
+          <a:solidFill>
+            <a:srgbClr val="D9D5CF"/>
+          </a:solidFill>
+          <a:ln w="12700">
+            <a:solidFill>
+              <a:srgbClr val="D9D5CF"/>
+            </a:solidFill>
+            <a:prstDash val="solid"/>
+          </a:ln>
+        </p:spPr>
+      </p:sp>
+      <p:sp>
+        <p:nvSpPr>
+          <p:cNvPr id="5" name="Shape 3"/>
+          <p:cNvSpPr/>
+          <p:nvPr/>
+        </p:nvSpPr>
+        <p:spPr>
+          <a:xfrm>
+            <a:off x="640080" y="1474470"/>
+            <a:ext cx="1481328" cy="2314194"/>
+          </a:xfrm>
+          <a:prstGeom prst="rect">
+            <a:avLst/>
+          </a:prstGeom>
+          <a:solidFill>
+            <a:srgbClr val="FFFFFF"/>
+          </a:solidFill>
+          <a:ln w="17780">
+            <a:solidFill>
+              <a:srgbClr val="8B4513"/>
+            </a:solidFill>
+            <a:prstDash val="solid"/>
+          </a:ln>
+        </p:spPr>
+      </p:sp>
+      <p:sp>
+        <p:nvSpPr>
+          <p:cNvPr id="6" name="Shape 4"/>
+          <p:cNvSpPr/>
+          <p:nvPr/>
+        </p:nvSpPr>
+        <p:spPr>
+          <a:xfrm>
+            <a:off x="2121408" y="2284438"/>
+            <a:ext cx="114300" cy="256032"/>
+          </a:xfrm>
+          <a:prstGeom prst="rect">
+            <a:avLst/>
+          </a:prstGeom>
+          <a:solidFill>
+            <a:srgbClr val="FFFFFF"/>
+          </a:solidFill>
+          <a:ln w="12700">
+            <a:solidFill>
+              <a:srgbClr val="D9D5CF"/>
+            </a:solidFill>
+            <a:prstDash val="solid"/>
+          </a:ln>
+        </p:spPr>
+      </p:sp>
+      <p:sp>
+        <p:nvSpPr>
+          <p:cNvPr id="7" name="Shape 5"/>
+          <p:cNvSpPr/>
+          <p:nvPr/>
+        </p:nvSpPr>
+        <p:spPr>
+          <a:xfrm>
+            <a:off x="2235708" y="1474470"/>
+            <a:ext cx="1481328" cy="2314194"/>
+          </a:xfrm>
+          <a:prstGeom prst="rect">
+            <a:avLst/>
+          </a:prstGeom>
+          <a:solidFill>
+            <a:srgbClr val="FFFFFF"/>
+          </a:solidFill>
+          <a:ln w="10160">
+            <a:solidFill>
+              <a:srgbClr val="D9D5CF"/>
+            </a:solidFill>
+            <a:prstDash val="solid"/>
+          </a:ln>
+        </p:spPr>
+      </p:sp>
+      <p:sp>
+        <p:nvSpPr>
+          <p:cNvPr id="8" name="Shape 6"/>
+          <p:cNvSpPr/>
+          <p:nvPr/>
+        </p:nvSpPr>
+        <p:spPr>
+          <a:xfrm>
+            <a:off x="3717036" y="2284438"/>
+            <a:ext cx="114300" cy="256032"/>
+          </a:xfrm>
+          <a:prstGeom prst="rect">
+            <a:avLst/>
+          </a:prstGeom>
+          <a:solidFill>
+            <a:srgbClr val="FFFFFF"/>
+          </a:solidFill>
+          <a:ln w="12700">
+            <a:solidFill>
+              <a:srgbClr val="D9D5CF"/>
+            </a:solidFill>
+            <a:prstDash val="solid"/>
+          </a:ln>
+        </p:spPr>
+      </p:sp>
+      <p:sp>
+        <p:nvSpPr>
+          <p:cNvPr id="9" name="Shape 7"/>
+          <p:cNvSpPr/>
+          <p:nvPr/>
+        </p:nvSpPr>
+        <p:spPr>
+          <a:xfrm>
+            <a:off x="3831336" y="1474470"/>
+            <a:ext cx="1481328" cy="2314194"/>
+          </a:xfrm>
+          <a:prstGeom prst="rect">
+            <a:avLst/>
+          </a:prstGeom>
+          <a:solidFill>
+            <a:srgbClr val="FFFFFF"/>
+          </a:solidFill>
+          <a:ln w="10160">
+            <a:solidFill>
+              <a:srgbClr val="D9D5CF"/>
+            </a:solidFill>
+            <a:prstDash val="solid"/>
+          </a:ln>
+        </p:spPr>
+      </p:sp>
+      <p:sp>
+        <p:nvSpPr>
+          <p:cNvPr id="10" name="Shape 8"/>
+          <p:cNvSpPr/>
+          <p:nvPr/>
+        </p:nvSpPr>
+        <p:spPr>
+          <a:xfrm>
+            <a:off x="5312664" y="2284438"/>
+            <a:ext cx="114300" cy="256032"/>
+          </a:xfrm>
+          <a:prstGeom prst="rect">
+            <a:avLst/>
+          </a:prstGeom>
+          <a:solidFill>
+            <a:srgbClr val="FFFFFF"/>
+          </a:solidFill>
+          <a:ln w="12700">
+            <a:solidFill>
+              <a:srgbClr val="D9D5CF"/>
+            </a:solidFill>
+            <a:prstDash val="solid"/>
+          </a:ln>
+        </p:spPr>
+      </p:sp>
+      <p:sp>
+        <p:nvSpPr>
+          <p:cNvPr id="11" name="Shape 9"/>
+          <p:cNvSpPr/>
+          <p:nvPr/>
+        </p:nvSpPr>
+        <p:spPr>
+          <a:xfrm>
+            <a:off x="5426964" y="1474470"/>
+            <a:ext cx="1481328" cy="2314194"/>
+          </a:xfrm>
+          <a:prstGeom prst="rect">
+            <a:avLst/>
+          </a:prstGeom>
+          <a:solidFill>
+            <a:srgbClr val="FFFFFF"/>
+          </a:solidFill>
+          <a:ln w="10160">
+            <a:solidFill>
+              <a:srgbClr val="D9D5CF"/>
+            </a:solidFill>
+            <a:prstDash val="solid"/>
+          </a:ln>
+        </p:spPr>
+      </p:sp>
+      <p:sp>
+        <p:nvSpPr>
+          <p:cNvPr id="12" name="Shape 10"/>
+          <p:cNvSpPr/>
+          <p:nvPr/>
+        </p:nvSpPr>
+        <p:spPr>
+          <a:xfrm>
+            <a:off x="6908292" y="2284438"/>
+            <a:ext cx="114300" cy="256032"/>
+          </a:xfrm>
+          <a:prstGeom prst="rect">
+            <a:avLst/>
+          </a:prstGeom>
+          <a:solidFill>
+            <a:srgbClr val="FFFFFF"/>
+          </a:solidFill>
+          <a:ln w="12700">
+            <a:solidFill>
+              <a:srgbClr val="D9D5CF"/>
+            </a:solidFill>
+            <a:prstDash val="solid"/>
+          </a:ln>
+        </p:spPr>
+      </p:sp>
+      <p:sp>
+        <p:nvSpPr>
+          <p:cNvPr id="13" name="Shape 11"/>
+          <p:cNvSpPr/>
+          <p:nvPr/>
+        </p:nvSpPr>
+        <p:spPr>
+          <a:xfrm>
+            <a:off x="7022592" y="1474470"/>
+            <a:ext cx="1481328" cy="2314194"/>
+          </a:xfrm>
+          <a:prstGeom prst="rect">
+            <a:avLst/>
+          </a:prstGeom>
+          <a:solidFill>
+            <a:srgbClr val="FFFFFF"/>
+          </a:solidFill>
+          <a:ln w="10160">
+            <a:solidFill>
+              <a:srgbClr val="D9D5CF"/>
+            </a:solidFill>
+            <a:prstDash val="solid"/>
+          </a:ln>
+        </p:spPr>
+      </p:sp>
+      <p:sp>
+        <p:nvSpPr>
+          <p:cNvPr id="14" name="Text 12"/>
+          <p:cNvSpPr/>
+          <p:nvPr/>
+        </p:nvSpPr>
+        <p:spPr>
+          <a:xfrm>
+            <a:off x="640080" y="3826764"/>
+            <a:ext cx="7863840" cy="292608"/>
+          </a:xfrm>
+          <a:prstGeom prst="rect">
+            <a:avLst/>
+          </a:prstGeom>
+          <a:noFill/>
+          <a:ln/>
+        </p:spPr>
+        <p:txBody>
+          <a:bodyPr wrap="square" rtlCol="0" anchor="t"/>
+          <a:lstStyle/>
+          <a:p>
+            <a:pPr algn="l" indent="0" marL="0">
+              <a:buNone/>
+            </a:pPr>
+            <a:r>
+              <a:rPr lang="en-US" sz="1200" dirty="0">
+                <a:solidFill>
+                  <a:srgbClr val="777777"/>
+                </a:solidFill>
+                <a:latin typeface="Microsoft YaHei" pitchFamily="34" charset="0"/>
+                <a:ea typeface="Microsoft YaHei" pitchFamily="34" charset="-122"/>
+                <a:cs typeface="Microsoft YaHei" pitchFamily="34" charset="-120"/>
+              </a:rPr>
+              <a:t>总结：通过分层到达与分区候诊，缩短交叉流线并提升导向清晰度。</a:t>
+            </a:r>
+            <a:endParaRPr lang="en-US" sz="1200" dirty="0"/>
+          </a:p>
+        </p:txBody>
+      </p:sp>
+      <p:sp>
+        <p:nvSpPr>
+          <p:cNvPr id="15" name="Text 13"/>
+          <p:cNvSpPr/>
+          <p:nvPr/>
+        </p:nvSpPr>
+        <p:spPr>
+          <a:xfrm>
+            <a:off x="640080" y="4530852"/>
+            <a:ext cx="5504688" cy="201168"/>
+          </a:xfrm>
+          <a:prstGeom prst="rect">
+            <a:avLst/>
+          </a:prstGeom>
+          <a:noFill/>
+          <a:ln/>
+        </p:spPr>
+        <p:txBody>
+          <a:bodyPr wrap="square" rtlCol="0" anchor="t"/>
+          <a:lstStyle/>
+          <a:p>
+            <a:pPr algn="l" indent="0" marL="0">
+              <a:buNone/>
+            </a:pPr>
+            <a:r>
+              <a:rPr lang="en-US" sz="800" dirty="0">
+                <a:solidFill>
+                  <a:srgbClr val="777777"/>
+                </a:solidFill>
+                <a:latin typeface="Microsoft YaHei" pitchFamily="34" charset="0"/>
+                <a:ea typeface="Microsoft YaHei" pitchFamily="34" charset="-122"/>
+                <a:cs typeface="Microsoft YaHei" pitchFamily="34" charset="-120"/>
+              </a:rPr>
+              <a:t>功能流线分析.pdf p.5</a:t>
+            </a:r>
+            <a:endParaRPr lang="en-US" sz="800" dirty="0"/>
+          </a:p>
+        </p:txBody>
+      </p:sp>
+      <p:sp>
+        <p:nvSpPr>
+          <p:cNvPr id="16" name="Shape 14"/>
+          <p:cNvSpPr/>
+          <p:nvPr/>
+        </p:nvSpPr>
+        <p:spPr>
+          <a:xfrm>
+            <a:off x="716280" y="1550670"/>
+            <a:ext cx="128016" cy="128016"/>
+          </a:xfrm>
+          <a:prstGeom prst="rect">
+            <a:avLst/>
+          </a:prstGeom>
+          <a:solidFill>
+            <a:srgbClr val="8B4513"/>
+          </a:solidFill>
+          <a:ln w="12700">
+            <a:solidFill>
+              <a:srgbClr val="8B4513"/>
+            </a:solidFill>
+            <a:prstDash val="solid"/>
+          </a:ln>
+        </p:spPr>
+      </p:sp>
+      <p:sp>
+        <p:nvSpPr>
+          <p:cNvPr id="17" name="Shape 15"/>
+          <p:cNvSpPr/>
+          <p:nvPr/>
+        </p:nvSpPr>
+        <p:spPr>
+          <a:xfrm>
+            <a:off x="2311908" y="1550670"/>
+            <a:ext cx="128016" cy="128016"/>
+          </a:xfrm>
+          <a:prstGeom prst="rect">
+            <a:avLst/>
+          </a:prstGeom>
+          <a:solidFill>
+            <a:srgbClr val="8B4513"/>
+          </a:solidFill>
+          <a:ln w="12700">
+            <a:solidFill>
+              <a:srgbClr val="8B4513"/>
+            </a:solidFill>
+            <a:prstDash val="solid"/>
+          </a:ln>
+        </p:spPr>
+      </p:sp>
+      <p:sp>
+        <p:nvSpPr>
+          <p:cNvPr id="18" name="Shape 16"/>
+          <p:cNvSpPr/>
+          <p:nvPr/>
+        </p:nvSpPr>
+        <p:spPr>
+          <a:xfrm>
+            <a:off x="3907536" y="1550670"/>
+            <a:ext cx="128016" cy="128016"/>
+          </a:xfrm>
+          <a:prstGeom prst="rect">
+            <a:avLst/>
+          </a:prstGeom>
+          <a:solidFill>
+            <a:srgbClr val="8B4513"/>
+          </a:solidFill>
+          <a:ln w="12700">
+            <a:solidFill>
+              <a:srgbClr val="8B4513"/>
+            </a:solidFill>
+            <a:prstDash val="solid"/>
+          </a:ln>
+        </p:spPr>
+      </p:sp>
+      <p:sp>
+        <p:nvSpPr>
+          <p:cNvPr id="19" name="Shape 17"/>
+          <p:cNvSpPr/>
+          <p:nvPr/>
+        </p:nvSpPr>
+        <p:spPr>
+          <a:xfrm>
+            <a:off x="5503164" y="1550670"/>
+            <a:ext cx="128016" cy="128016"/>
+          </a:xfrm>
+          <a:prstGeom prst="rect">
+            <a:avLst/>
+          </a:prstGeom>
+          <a:solidFill>
+            <a:srgbClr val="8B4513"/>
+          </a:solidFill>
+          <a:ln w="12700">
+            <a:solidFill>
+              <a:srgbClr val="8B4513"/>
+            </a:solidFill>
+            <a:prstDash val="solid"/>
+          </a:ln>
+        </p:spPr>
+      </p:sp>
+      <p:sp>
+        <p:nvSpPr>
+          <p:cNvPr id="20" name="Shape 18"/>
+          <p:cNvSpPr/>
+          <p:nvPr/>
+        </p:nvSpPr>
+        <p:spPr>
+          <a:xfrm>
+            <a:off x="7098792" y="1550670"/>
+            <a:ext cx="128016" cy="128016"/>
+          </a:xfrm>
+          <a:prstGeom prst="rect">
+            <a:avLst/>
+          </a:prstGeom>
+          <a:solidFill>
+            <a:srgbClr val="8B4513"/>
+          </a:solidFill>
+          <a:ln w="12700">
+            <a:solidFill>
+              <a:srgbClr val="8B4513"/>
+            </a:solidFill>
+            <a:prstDash val="solid"/>
+          </a:ln>
+        </p:spPr>
+      </p:sp>
+      <p:sp>
+        <p:nvSpPr>
+          <p:cNvPr id="21" name="Text 19"/>
+          <p:cNvSpPr/>
+          <p:nvPr/>
+        </p:nvSpPr>
+        <p:spPr>
+          <a:xfrm>
+            <a:off x="792480" y="2261296"/>
+            <a:ext cx="1252728" cy="647974"/>
           </a:xfrm>
           <a:prstGeom prst="rect">
             <a:avLst/>
@@ -1020,39 +1473,14 @@
       </p:sp>
       <p:sp>
         <p:nvSpPr>
-          <p:cNvPr id="5" name="Shape 3"/>
-          <p:cNvSpPr/>
-          <p:nvPr/>
-        </p:nvSpPr>
-        <p:spPr>
-          <a:xfrm>
-            <a:off x="2121408" y="2271065"/>
-            <a:ext cx="114300" cy="256032"/>
-          </a:xfrm>
-          <a:prstGeom prst="rect">
-            <a:avLst/>
-          </a:prstGeom>
-          <a:solidFill>
-            <a:srgbClr val="FFFFFF"/>
-          </a:solidFill>
-          <a:ln w="12700">
-            <a:solidFill>
-              <a:srgbClr val="D9D5CF"/>
-            </a:solidFill>
-            <a:prstDash val="solid"/>
-          </a:ln>
-        </p:spPr>
-      </p:sp>
-      <p:sp>
-        <p:nvSpPr>
-          <p:cNvPr id="6" name="Text 4"/>
-          <p:cNvSpPr/>
-          <p:nvPr/>
-        </p:nvSpPr>
-        <p:spPr>
-          <a:xfrm>
-            <a:off x="2235708" y="1453896"/>
-            <a:ext cx="1481328" cy="2334768"/>
+          <p:cNvPr id="22" name="Text 20"/>
+          <p:cNvSpPr/>
+          <p:nvPr/>
+        </p:nvSpPr>
+        <p:spPr>
+          <a:xfrm>
+            <a:off x="2388108" y="2261296"/>
+            <a:ext cx="1252728" cy="647974"/>
           </a:xfrm>
           <a:prstGeom prst="rect">
             <a:avLst/>
@@ -1084,39 +1512,14 @@
       </p:sp>
       <p:sp>
         <p:nvSpPr>
-          <p:cNvPr id="7" name="Shape 5"/>
-          <p:cNvSpPr/>
-          <p:nvPr/>
-        </p:nvSpPr>
-        <p:spPr>
-          <a:xfrm>
-            <a:off x="3717036" y="2271065"/>
-            <a:ext cx="114300" cy="256032"/>
-          </a:xfrm>
-          <a:prstGeom prst="rect">
-            <a:avLst/>
-          </a:prstGeom>
-          <a:solidFill>
-            <a:srgbClr val="FFFFFF"/>
-          </a:solidFill>
-          <a:ln w="12700">
-            <a:solidFill>
-              <a:srgbClr val="D9D5CF"/>
-            </a:solidFill>
-            <a:prstDash val="solid"/>
-          </a:ln>
-        </p:spPr>
-      </p:sp>
-      <p:sp>
-        <p:nvSpPr>
-          <p:cNvPr id="8" name="Text 6"/>
-          <p:cNvSpPr/>
-          <p:nvPr/>
-        </p:nvSpPr>
-        <p:spPr>
-          <a:xfrm>
-            <a:off x="3831336" y="1453896"/>
-            <a:ext cx="1481328" cy="2334768"/>
+          <p:cNvPr id="23" name="Text 21"/>
+          <p:cNvSpPr/>
+          <p:nvPr/>
+        </p:nvSpPr>
+        <p:spPr>
+          <a:xfrm>
+            <a:off x="3983736" y="2261296"/>
+            <a:ext cx="1252728" cy="647974"/>
           </a:xfrm>
           <a:prstGeom prst="rect">
             <a:avLst/>
@@ -1148,39 +1551,14 @@
       </p:sp>
       <p:sp>
         <p:nvSpPr>
-          <p:cNvPr id="9" name="Shape 7"/>
-          <p:cNvSpPr/>
-          <p:nvPr/>
-        </p:nvSpPr>
-        <p:spPr>
-          <a:xfrm>
-            <a:off x="5312664" y="2271065"/>
-            <a:ext cx="114300" cy="256032"/>
-          </a:xfrm>
-          <a:prstGeom prst="rect">
-            <a:avLst/>
-          </a:prstGeom>
-          <a:solidFill>
-            <a:srgbClr val="FFFFFF"/>
-          </a:solidFill>
-          <a:ln w="12700">
-            <a:solidFill>
-              <a:srgbClr val="D9D5CF"/>
-            </a:solidFill>
-            <a:prstDash val="solid"/>
-          </a:ln>
-        </p:spPr>
-      </p:sp>
-      <p:sp>
-        <p:nvSpPr>
-          <p:cNvPr id="10" name="Text 8"/>
-          <p:cNvSpPr/>
-          <p:nvPr/>
-        </p:nvSpPr>
-        <p:spPr>
-          <a:xfrm>
-            <a:off x="5426964" y="1453896"/>
-            <a:ext cx="1481328" cy="2334768"/>
+          <p:cNvPr id="24" name="Text 22"/>
+          <p:cNvSpPr/>
+          <p:nvPr/>
+        </p:nvSpPr>
+        <p:spPr>
+          <a:xfrm>
+            <a:off x="5579364" y="2261296"/>
+            <a:ext cx="1252728" cy="647974"/>
           </a:xfrm>
           <a:prstGeom prst="rect">
             <a:avLst/>
@@ -1212,39 +1590,14 @@
       </p:sp>
       <p:sp>
         <p:nvSpPr>
-          <p:cNvPr id="11" name="Shape 9"/>
-          <p:cNvSpPr/>
-          <p:nvPr/>
-        </p:nvSpPr>
-        <p:spPr>
-          <a:xfrm>
-            <a:off x="6908292" y="2271065"/>
-            <a:ext cx="114300" cy="256032"/>
-          </a:xfrm>
-          <a:prstGeom prst="rect">
-            <a:avLst/>
-          </a:prstGeom>
-          <a:solidFill>
-            <a:srgbClr val="FFFFFF"/>
-          </a:solidFill>
-          <a:ln w="12700">
-            <a:solidFill>
-              <a:srgbClr val="D9D5CF"/>
-            </a:solidFill>
-            <a:prstDash val="solid"/>
-          </a:ln>
-        </p:spPr>
-      </p:sp>
-      <p:sp>
-        <p:nvSpPr>
-          <p:cNvPr id="12" name="Text 10"/>
-          <p:cNvSpPr/>
-          <p:nvPr/>
-        </p:nvSpPr>
-        <p:spPr>
-          <a:xfrm>
-            <a:off x="7022592" y="1453896"/>
-            <a:ext cx="1481328" cy="2334768"/>
+          <p:cNvPr id="25" name="Text 23"/>
+          <p:cNvSpPr/>
+          <p:nvPr/>
+        </p:nvSpPr>
+        <p:spPr>
+          <a:xfrm>
+            <a:off x="7174992" y="2261296"/>
+            <a:ext cx="1252728" cy="647974"/>
           </a:xfrm>
           <a:prstGeom prst="rect">
             <a:avLst/>
@@ -1271,84 +1624,6 @@
               <a:t>5. 家属短停</a:t>
             </a:r>
             <a:endParaRPr lang="en-US" sz="1600" dirty="0"/>
-          </a:p>
-        </p:txBody>
-      </p:sp>
-      <p:sp>
-        <p:nvSpPr>
-          <p:cNvPr id="13" name="Text 11"/>
-          <p:cNvSpPr/>
-          <p:nvPr/>
-        </p:nvSpPr>
-        <p:spPr>
-          <a:xfrm>
-            <a:off x="640080" y="3826764"/>
-            <a:ext cx="7863840" cy="292608"/>
-          </a:xfrm>
-          <a:prstGeom prst="rect">
-            <a:avLst/>
-          </a:prstGeom>
-          <a:noFill/>
-          <a:ln/>
-        </p:spPr>
-        <p:txBody>
-          <a:bodyPr wrap="square" rtlCol="0" anchor="t"/>
-          <a:lstStyle/>
-          <a:p>
-            <a:pPr algn="l" indent="0" marL="0">
-              <a:buNone/>
-            </a:pPr>
-            <a:r>
-              <a:rPr lang="en-US" sz="1200" dirty="0">
-                <a:solidFill>
-                  <a:srgbClr val="777777"/>
-                </a:solidFill>
-                <a:latin typeface="Microsoft YaHei" pitchFamily="34" charset="0"/>
-                <a:ea typeface="Microsoft YaHei" pitchFamily="34" charset="-122"/>
-                <a:cs typeface="Microsoft YaHei" pitchFamily="34" charset="-120"/>
-              </a:rPr>
-              <a:t>总结：通过分层到达与分区候诊，缩短交叉流线并提升导向清晰度。</a:t>
-            </a:r>
-            <a:endParaRPr lang="en-US" sz="1200" dirty="0"/>
-          </a:p>
-        </p:txBody>
-      </p:sp>
-      <p:sp>
-        <p:nvSpPr>
-          <p:cNvPr id="14" name="Text 12"/>
-          <p:cNvSpPr/>
-          <p:nvPr/>
-        </p:nvSpPr>
-        <p:spPr>
-          <a:xfrm>
-            <a:off x="640080" y="4530852"/>
-            <a:ext cx="5504688" cy="201168"/>
-          </a:xfrm>
-          <a:prstGeom prst="rect">
-            <a:avLst/>
-          </a:prstGeom>
-          <a:noFill/>
-          <a:ln/>
-        </p:spPr>
-        <p:txBody>
-          <a:bodyPr wrap="square" rtlCol="0" anchor="t"/>
-          <a:lstStyle/>
-          <a:p>
-            <a:pPr algn="l" indent="0" marL="0">
-              <a:buNone/>
-            </a:pPr>
-            <a:r>
-              <a:rPr lang="en-US" sz="800" dirty="0">
-                <a:solidFill>
-                  <a:srgbClr val="777777"/>
-                </a:solidFill>
-                <a:latin typeface="Microsoft YaHei" pitchFamily="34" charset="0"/>
-                <a:ea typeface="Microsoft YaHei" pitchFamily="34" charset="-122"/>
-                <a:cs typeface="Microsoft YaHei" pitchFamily="34" charset="-120"/>
-              </a:rPr>
-              <a:t>功能流线分析.pdf p.5</a:t>
-            </a:r>
-            <a:endParaRPr lang="en-US" sz="800" dirty="0"/>
           </a:p>
         </p:txBody>
       </p:sp>

--- a/tests/benchmark/architectural_slides/case_009_patient_journey/output.pptx
+++ b/tests/benchmark/architectural_slides/case_009_patient_journey/output.pptx
@@ -910,7 +910,7 @@
         <p:spPr>
           <a:xfrm>
             <a:off x="640080" y="411480"/>
-            <a:ext cx="7863840" cy="621792"/>
+            <a:ext cx="7863840" cy="601218"/>
           </a:xfrm>
           <a:prstGeom prst="rect">
             <a:avLst/>
@@ -948,7 +948,7 @@
         </p:nvSpPr>
         <p:spPr>
           <a:xfrm>
-            <a:off x="640080" y="1071372"/>
+            <a:off x="640080" y="1050798"/>
             <a:ext cx="7863840" cy="326898"/>
           </a:xfrm>
           <a:prstGeom prst="rect">
@@ -987,7 +987,7 @@
         </p:nvSpPr>
         <p:spPr>
           <a:xfrm>
-            <a:off x="1380744" y="1752173"/>
+            <a:off x="1380744" y="1734068"/>
             <a:ext cx="6382512" cy="32004"/>
           </a:xfrm>
           <a:prstGeom prst="rect">
@@ -1012,8 +1012,8 @@
         </p:nvSpPr>
         <p:spPr>
           <a:xfrm>
-            <a:off x="640080" y="1474470"/>
-            <a:ext cx="1481328" cy="2314194"/>
+            <a:off x="640080" y="1453896"/>
+            <a:ext cx="1481328" cy="2334768"/>
           </a:xfrm>
           <a:prstGeom prst="rect">
             <a:avLst/>
@@ -1037,7 +1037,7 @@
         </p:nvSpPr>
         <p:spPr>
           <a:xfrm>
-            <a:off x="2121408" y="2284438"/>
+            <a:off x="2121408" y="2271065"/>
             <a:ext cx="114300" cy="256032"/>
           </a:xfrm>
           <a:prstGeom prst="rect">
@@ -1062,8 +1062,8 @@
         </p:nvSpPr>
         <p:spPr>
           <a:xfrm>
-            <a:off x="2235708" y="1474470"/>
-            <a:ext cx="1481328" cy="2314194"/>
+            <a:off x="2235708" y="1453896"/>
+            <a:ext cx="1481328" cy="2334768"/>
           </a:xfrm>
           <a:prstGeom prst="rect">
             <a:avLst/>
@@ -1087,7 +1087,7 @@
         </p:nvSpPr>
         <p:spPr>
           <a:xfrm>
-            <a:off x="3717036" y="2284438"/>
+            <a:off x="3717036" y="2271065"/>
             <a:ext cx="114300" cy="256032"/>
           </a:xfrm>
           <a:prstGeom prst="rect">
@@ -1112,8 +1112,8 @@
         </p:nvSpPr>
         <p:spPr>
           <a:xfrm>
-            <a:off x="3831336" y="1474470"/>
-            <a:ext cx="1481328" cy="2314194"/>
+            <a:off x="3831336" y="1453896"/>
+            <a:ext cx="1481328" cy="2334768"/>
           </a:xfrm>
           <a:prstGeom prst="rect">
             <a:avLst/>
@@ -1137,7 +1137,7 @@
         </p:nvSpPr>
         <p:spPr>
           <a:xfrm>
-            <a:off x="5312664" y="2284438"/>
+            <a:off x="5312664" y="2271065"/>
             <a:ext cx="114300" cy="256032"/>
           </a:xfrm>
           <a:prstGeom prst="rect">
@@ -1162,8 +1162,8 @@
         </p:nvSpPr>
         <p:spPr>
           <a:xfrm>
-            <a:off x="5426964" y="1474470"/>
-            <a:ext cx="1481328" cy="2314194"/>
+            <a:off x="5426964" y="1453896"/>
+            <a:ext cx="1481328" cy="2334768"/>
           </a:xfrm>
           <a:prstGeom prst="rect">
             <a:avLst/>
@@ -1187,7 +1187,7 @@
         </p:nvSpPr>
         <p:spPr>
           <a:xfrm>
-            <a:off x="6908292" y="2284438"/>
+            <a:off x="6908292" y="2271065"/>
             <a:ext cx="114300" cy="256032"/>
           </a:xfrm>
           <a:prstGeom prst="rect">
@@ -1212,8 +1212,8 @@
         </p:nvSpPr>
         <p:spPr>
           <a:xfrm>
-            <a:off x="7022592" y="1474470"/>
-            <a:ext cx="1481328" cy="2314194"/>
+            <a:off x="7022592" y="1453896"/>
+            <a:ext cx="1481328" cy="2334768"/>
           </a:xfrm>
           <a:prstGeom prst="rect">
             <a:avLst/>
@@ -1315,7 +1315,7 @@
         </p:nvSpPr>
         <p:spPr>
           <a:xfrm>
-            <a:off x="716280" y="1550670"/>
+            <a:off x="716280" y="1530096"/>
             <a:ext cx="128016" cy="128016"/>
           </a:xfrm>
           <a:prstGeom prst="rect">
@@ -1340,7 +1340,7 @@
         </p:nvSpPr>
         <p:spPr>
           <a:xfrm>
-            <a:off x="2311908" y="1550670"/>
+            <a:off x="2311908" y="1530096"/>
             <a:ext cx="128016" cy="128016"/>
           </a:xfrm>
           <a:prstGeom prst="rect">
@@ -1365,7 +1365,7 @@
         </p:nvSpPr>
         <p:spPr>
           <a:xfrm>
-            <a:off x="3907536" y="1550670"/>
+            <a:off x="3907536" y="1530096"/>
             <a:ext cx="128016" cy="128016"/>
           </a:xfrm>
           <a:prstGeom prst="rect">
@@ -1390,7 +1390,7 @@
         </p:nvSpPr>
         <p:spPr>
           <a:xfrm>
-            <a:off x="5503164" y="1550670"/>
+            <a:off x="5503164" y="1530096"/>
             <a:ext cx="128016" cy="128016"/>
           </a:xfrm>
           <a:prstGeom prst="rect">
@@ -1415,7 +1415,7 @@
         </p:nvSpPr>
         <p:spPr>
           <a:xfrm>
-            <a:off x="7098792" y="1550670"/>
+            <a:off x="7098792" y="1530096"/>
             <a:ext cx="128016" cy="128016"/>
           </a:xfrm>
           <a:prstGeom prst="rect">
@@ -1440,8 +1440,8 @@
         </p:nvSpPr>
         <p:spPr>
           <a:xfrm>
-            <a:off x="792480" y="2261296"/>
-            <a:ext cx="1252728" cy="647974"/>
+            <a:off x="792480" y="2247717"/>
+            <a:ext cx="1252728" cy="653735"/>
           </a:xfrm>
           <a:prstGeom prst="rect">
             <a:avLst/>
@@ -1479,8 +1479,8 @@
         </p:nvSpPr>
         <p:spPr>
           <a:xfrm>
-            <a:off x="2388108" y="2261296"/>
-            <a:ext cx="1252728" cy="647974"/>
+            <a:off x="2388108" y="2247717"/>
+            <a:ext cx="1252728" cy="653735"/>
           </a:xfrm>
           <a:prstGeom prst="rect">
             <a:avLst/>
@@ -1518,8 +1518,8 @@
         </p:nvSpPr>
         <p:spPr>
           <a:xfrm>
-            <a:off x="3983736" y="2261296"/>
-            <a:ext cx="1252728" cy="647974"/>
+            <a:off x="3983736" y="2247717"/>
+            <a:ext cx="1252728" cy="653735"/>
           </a:xfrm>
           <a:prstGeom prst="rect">
             <a:avLst/>
@@ -1557,8 +1557,8 @@
         </p:nvSpPr>
         <p:spPr>
           <a:xfrm>
-            <a:off x="5579364" y="2261296"/>
-            <a:ext cx="1252728" cy="647974"/>
+            <a:off x="5579364" y="2247717"/>
+            <a:ext cx="1252728" cy="653735"/>
           </a:xfrm>
           <a:prstGeom prst="rect">
             <a:avLst/>
@@ -1596,8 +1596,8 @@
         </p:nvSpPr>
         <p:spPr>
           <a:xfrm>
-            <a:off x="7174992" y="2261296"/>
-            <a:ext cx="1252728" cy="647974"/>
+            <a:off x="7174992" y="2247717"/>
+            <a:ext cx="1252728" cy="653735"/>
           </a:xfrm>
           <a:prstGeom prst="rect">
             <a:avLst/>
